--- a/ゲーム科1年/00_前期/プログラミングⅠ/05_変数.pptx
+++ b/ゲーム科1年/00_前期/プログラミングⅠ/05_変数.pptx
@@ -273,7 +273,7 @@
           <a:p>
             <a:fld id="{E9CC885B-4903-4D54-9A93-00025F12DED9}" type="datetimeFigureOut">
               <a:rPr kumimoji="1" lang="ja-JP" altLang="en-US" smtClean="0"/>
-              <a:t>2024/11/14</a:t>
+              <a:t>2025/2/28</a:t>
             </a:fld>
             <a:endParaRPr kumimoji="1" lang="ja-JP" altLang="en-US"/>
           </a:p>
@@ -503,7 +503,7 @@
           <a:p>
             <a:fld id="{E9CC885B-4903-4D54-9A93-00025F12DED9}" type="datetimeFigureOut">
               <a:rPr kumimoji="1" lang="ja-JP" altLang="en-US" smtClean="0"/>
-              <a:t>2024/11/14</a:t>
+              <a:t>2025/2/28</a:t>
             </a:fld>
             <a:endParaRPr kumimoji="1" lang="ja-JP" altLang="en-US"/>
           </a:p>
@@ -743,7 +743,7 @@
           <a:p>
             <a:fld id="{E9CC885B-4903-4D54-9A93-00025F12DED9}" type="datetimeFigureOut">
               <a:rPr kumimoji="1" lang="ja-JP" altLang="en-US" smtClean="0"/>
-              <a:t>2024/11/14</a:t>
+              <a:t>2025/2/28</a:t>
             </a:fld>
             <a:endParaRPr kumimoji="1" lang="ja-JP" altLang="en-US"/>
           </a:p>
@@ -973,7 +973,7 @@
           <a:p>
             <a:fld id="{E9CC885B-4903-4D54-9A93-00025F12DED9}" type="datetimeFigureOut">
               <a:rPr kumimoji="1" lang="ja-JP" altLang="en-US" smtClean="0"/>
-              <a:t>2024/11/14</a:t>
+              <a:t>2025/2/28</a:t>
             </a:fld>
             <a:endParaRPr kumimoji="1" lang="ja-JP" altLang="en-US"/>
           </a:p>
@@ -1248,7 +1248,7 @@
           <a:p>
             <a:fld id="{E9CC885B-4903-4D54-9A93-00025F12DED9}" type="datetimeFigureOut">
               <a:rPr kumimoji="1" lang="ja-JP" altLang="en-US" smtClean="0"/>
-              <a:t>2024/11/14</a:t>
+              <a:t>2025/2/28</a:t>
             </a:fld>
             <a:endParaRPr kumimoji="1" lang="ja-JP" altLang="en-US"/>
           </a:p>
@@ -1577,7 +1577,7 @@
           <a:p>
             <a:fld id="{E9CC885B-4903-4D54-9A93-00025F12DED9}" type="datetimeFigureOut">
               <a:rPr kumimoji="1" lang="ja-JP" altLang="en-US" smtClean="0"/>
-              <a:t>2024/11/14</a:t>
+              <a:t>2025/2/28</a:t>
             </a:fld>
             <a:endParaRPr kumimoji="1" lang="ja-JP" altLang="en-US"/>
           </a:p>
@@ -2053,7 +2053,7 @@
           <a:p>
             <a:fld id="{E9CC885B-4903-4D54-9A93-00025F12DED9}" type="datetimeFigureOut">
               <a:rPr kumimoji="1" lang="ja-JP" altLang="en-US" smtClean="0"/>
-              <a:t>2024/11/14</a:t>
+              <a:t>2025/2/28</a:t>
             </a:fld>
             <a:endParaRPr kumimoji="1" lang="ja-JP" altLang="en-US"/>
           </a:p>
@@ -2194,7 +2194,7 @@
           <a:p>
             <a:fld id="{E9CC885B-4903-4D54-9A93-00025F12DED9}" type="datetimeFigureOut">
               <a:rPr kumimoji="1" lang="ja-JP" altLang="en-US" smtClean="0"/>
-              <a:t>2024/11/14</a:t>
+              <a:t>2025/2/28</a:t>
             </a:fld>
             <a:endParaRPr kumimoji="1" lang="ja-JP" altLang="en-US"/>
           </a:p>
@@ -2307,7 +2307,7 @@
           <a:p>
             <a:fld id="{E9CC885B-4903-4D54-9A93-00025F12DED9}" type="datetimeFigureOut">
               <a:rPr kumimoji="1" lang="ja-JP" altLang="en-US" smtClean="0"/>
-              <a:t>2024/11/14</a:t>
+              <a:t>2025/2/28</a:t>
             </a:fld>
             <a:endParaRPr kumimoji="1" lang="ja-JP" altLang="en-US"/>
           </a:p>
@@ -2650,7 +2650,7 @@
           <a:p>
             <a:fld id="{E9CC885B-4903-4D54-9A93-00025F12DED9}" type="datetimeFigureOut">
               <a:rPr kumimoji="1" lang="ja-JP" altLang="en-US" smtClean="0"/>
-              <a:t>2024/11/14</a:t>
+              <a:t>2025/2/28</a:t>
             </a:fld>
             <a:endParaRPr kumimoji="1" lang="ja-JP" altLang="en-US"/>
           </a:p>
@@ -2938,7 +2938,7 @@
           <a:p>
             <a:fld id="{E9CC885B-4903-4D54-9A93-00025F12DED9}" type="datetimeFigureOut">
               <a:rPr kumimoji="1" lang="ja-JP" altLang="en-US" smtClean="0"/>
-              <a:t>2024/11/14</a:t>
+              <a:t>2025/2/28</a:t>
             </a:fld>
             <a:endParaRPr kumimoji="1" lang="ja-JP" altLang="en-US"/>
           </a:p>
@@ -3211,7 +3211,7 @@
           <a:p>
             <a:fld id="{E9CC885B-4903-4D54-9A93-00025F12DED9}" type="datetimeFigureOut">
               <a:rPr kumimoji="1" lang="ja-JP" altLang="en-US" smtClean="0"/>
-              <a:t>2024/11/14</a:t>
+              <a:t>2025/2/28</a:t>
             </a:fld>
             <a:endParaRPr kumimoji="1" lang="ja-JP" altLang="en-US"/>
           </a:p>
@@ -5114,7 +5114,19 @@
           <a:p>
             <a:r>
               <a:rPr kumimoji="1" lang="ja-JP" altLang="en-US" sz="2400" dirty="0"/>
-              <a:t>例えば、電卓で２つの数字を足し算するとしましょう。</a:t>
+              <a:t>例えば、電卓で</a:t>
+            </a:r>
+            <a:r>
+              <a:rPr kumimoji="1" lang="ja-JP" altLang="en-US" sz="2400" b="1" dirty="0">
+                <a:solidFill>
+                  <a:srgbClr val="FF0000"/>
+                </a:solidFill>
+              </a:rPr>
+              <a:t>２つの数字を足し算</a:t>
+            </a:r>
+            <a:r>
+              <a:rPr kumimoji="1" lang="ja-JP" altLang="en-US" sz="2400" dirty="0"/>
+              <a:t>するとしましょう。</a:t>
             </a:r>
             <a:endParaRPr kumimoji="1" lang="en-US" altLang="ja-JP" sz="2400" dirty="0"/>
           </a:p>
@@ -6309,12 +6321,32 @@
             <a:r>
               <a:rPr kumimoji="1" lang="ja-JP" altLang="en-US" sz="4000" b="1" dirty="0">
                 <a:solidFill>
+                  <a:srgbClr val="0070C0"/>
+                </a:solidFill>
+                <a:latin typeface="BIZ UD明朝 Medium" panose="02020500000000000000" pitchFamily="17" charset="-128"/>
+                <a:ea typeface="BIZ UD明朝 Medium" panose="02020500000000000000" pitchFamily="17" charset="-128"/>
+              </a:rPr>
+              <a:t>型名</a:t>
+            </a:r>
+            <a:r>
+              <a:rPr kumimoji="1" lang="ja-JP" altLang="en-US" sz="4000" b="1" dirty="0">
+                <a:solidFill>
                   <a:srgbClr val="FF0000"/>
                 </a:solidFill>
                 <a:latin typeface="BIZ UD明朝 Medium" panose="02020500000000000000" pitchFamily="17" charset="-128"/>
                 <a:ea typeface="BIZ UD明朝 Medium" panose="02020500000000000000" pitchFamily="17" charset="-128"/>
               </a:rPr>
-              <a:t>型名　変数名　＝　初期値</a:t>
+              <a:t>　変数名　＝　</a:t>
+            </a:r>
+            <a:r>
+              <a:rPr kumimoji="1" lang="ja-JP" altLang="en-US" sz="4000" b="1" dirty="0">
+                <a:solidFill>
+                  <a:srgbClr val="00B050"/>
+                </a:solidFill>
+                <a:latin typeface="BIZ UD明朝 Medium" panose="02020500000000000000" pitchFamily="17" charset="-128"/>
+                <a:ea typeface="BIZ UD明朝 Medium" panose="02020500000000000000" pitchFamily="17" charset="-128"/>
+              </a:rPr>
+              <a:t>初期値</a:t>
             </a:r>
             <a:r>
               <a:rPr kumimoji="1" lang="en-US" altLang="ja-JP" sz="4000" b="1" dirty="0">
@@ -6339,32 +6371,60 @@
           </a:p>
           <a:p>
             <a:r>
-              <a:rPr lang="ja-JP" altLang="en-US" sz="2400" dirty="0"/>
+              <a:rPr lang="ja-JP" altLang="en-US" sz="2400" b="1" dirty="0">
+                <a:solidFill>
+                  <a:srgbClr val="0070C0"/>
+                </a:solidFill>
+              </a:rPr>
               <a:t>型名　・・・</a:t>
             </a:r>
             <a:r>
-              <a:rPr lang="en-US" altLang="ja-JP" sz="2400" dirty="0"/>
+              <a:rPr lang="en-US" altLang="ja-JP" sz="2400" b="1" dirty="0">
+                <a:solidFill>
+                  <a:srgbClr val="0070C0"/>
+                </a:solidFill>
+              </a:rPr>
               <a:t>int</a:t>
             </a:r>
           </a:p>
           <a:p>
             <a:r>
-              <a:rPr lang="ja-JP" altLang="en-US" sz="2400" dirty="0"/>
+              <a:rPr lang="ja-JP" altLang="en-US" sz="2400" b="1" dirty="0">
+                <a:solidFill>
+                  <a:srgbClr val="FF0000"/>
+                </a:solidFill>
+              </a:rPr>
               <a:t>変数名・・・</a:t>
             </a:r>
             <a:r>
-              <a:rPr lang="en-US" altLang="ja-JP" sz="2400" dirty="0" err="1"/>
+              <a:rPr lang="en-US" altLang="ja-JP" sz="2400" b="1" dirty="0" err="1">
+                <a:solidFill>
+                  <a:srgbClr val="FF0000"/>
+                </a:solidFill>
+              </a:rPr>
               <a:t>numberA</a:t>
             </a:r>
-            <a:endParaRPr lang="en-US" altLang="ja-JP" sz="2400" dirty="0"/>
-          </a:p>
-          <a:p>
-            <a:r>
-              <a:rPr lang="ja-JP" altLang="en-US" sz="2400" dirty="0"/>
+            <a:endParaRPr lang="en-US" altLang="ja-JP" sz="2400" b="1" dirty="0">
+              <a:solidFill>
+                <a:srgbClr val="FF0000"/>
+              </a:solidFill>
+            </a:endParaRPr>
+          </a:p>
+          <a:p>
+            <a:r>
+              <a:rPr lang="ja-JP" altLang="en-US" sz="2400" b="1" dirty="0">
+                <a:solidFill>
+                  <a:srgbClr val="00B050"/>
+                </a:solidFill>
+              </a:rPr>
               <a:t>初期値・・・</a:t>
             </a:r>
             <a:r>
-              <a:rPr lang="en-US" altLang="ja-JP" sz="2400" dirty="0"/>
+              <a:rPr lang="en-US" altLang="ja-JP" sz="2400" b="1" dirty="0">
+                <a:solidFill>
+                  <a:srgbClr val="00B050"/>
+                </a:solidFill>
+              </a:rPr>
               <a:t>10</a:t>
             </a:r>
           </a:p>
@@ -6877,10 +6937,18 @@
           </a:p>
           <a:p>
             <a:r>
-              <a:rPr lang="ja-JP" altLang="en-US" sz="2400" dirty="0"/>
+              <a:rPr lang="ja-JP" altLang="en-US" sz="2400" b="1" dirty="0">
+                <a:solidFill>
+                  <a:srgbClr val="FF0000"/>
+                </a:solidFill>
+              </a:rPr>
               <a:t>■よい例</a:t>
             </a:r>
-            <a:endParaRPr lang="en-US" altLang="ja-JP" sz="2400" dirty="0"/>
+            <a:endParaRPr lang="en-US" altLang="ja-JP" sz="2400" b="1" dirty="0">
+              <a:solidFill>
+                <a:srgbClr val="FF0000"/>
+              </a:solidFill>
+            </a:endParaRPr>
           </a:p>
           <a:p>
             <a:r>
@@ -6899,10 +6967,18 @@
           </a:p>
           <a:p>
             <a:r>
-              <a:rPr lang="ja-JP" altLang="en-US" sz="2400" dirty="0"/>
+              <a:rPr lang="ja-JP" altLang="en-US" sz="2400" b="1" dirty="0">
+                <a:solidFill>
+                  <a:srgbClr val="0070C0"/>
+                </a:solidFill>
+              </a:rPr>
               <a:t>■悪い例</a:t>
             </a:r>
-            <a:endParaRPr lang="en-US" altLang="ja-JP" sz="2400" dirty="0"/>
+            <a:endParaRPr lang="en-US" altLang="ja-JP" sz="2400" b="1" dirty="0">
+              <a:solidFill>
+                <a:srgbClr val="0070C0"/>
+              </a:solidFill>
+            </a:endParaRPr>
           </a:p>
           <a:p>
             <a:r>
